--- a/slides/DevOps-PlatformEngineering-Day2-Deliver.pptx
+++ b/slides/DevOps-PlatformEngineering-Day2-Deliver.pptx
@@ -8850,7 +8850,7 @@
               </a:defRPr>
             </a:pPr>
             <a:r>
-              <a:t># ~180 MB, far fewer CVEs, no secrets, non-root, rebuilds in seconds</a:t>
+              <a:t># far smaller (a fraction of the original), fewer CVEs, no secrets, non-root,</a:t>
             </a:r>
           </a:p>
           <a:p>
@@ -8863,7 +8863,7 @@
               </a:defRPr>
             </a:pPr>
             <a:r>
-              <a:t># when only application code changed.</a:t>
+              <a:t># and it rebuilds in seconds when only application code changed.</a:t>
             </a:r>
           </a:p>
         </p:txBody>
